--- a/classes/parte-18-ia-aplicada-a-la-ciberseguridad/338-generacion-de-informes-y-flujos-de-trabajo-con-ia/clase-338-presentacion.pptx
+++ b/classes/parte-18-ia-aplicada-a-la-ciberseguridad/338-generacion-de-informes-y-flujos-de-trabajo-con-ia/clase-338-presentacion.pptx
@@ -17,6 +17,10 @@
     <p:sldId id="265" r:id="rId16"/>
     <p:sldId id="266" r:id="rId17"/>
     <p:sldId id="267" r:id="rId18"/>
+    <p:sldId id="268" r:id="rId19"/>
+    <p:sldId id="269" r:id="rId20"/>
+    <p:sldId id="270" r:id="rId21"/>
+    <p:sldId id="271" r:id="rId22"/>
   </p:sldIdLst>
   <p:sldSz cx="9144000" cy="6858000" type="screen4x3"/>
   <p:notesSz cx="6858000" cy="9144000"/>
@@ -3198,7 +3202,7 @@
                   <a:srgbClr val="0B3D2E"/>
                 </a:solidFill>
               </a:rPr>
-              <a:t>⚠️ Errores comunes</a:t>
+              <a:t>🧪 Laboratorio guiado</a:t>
             </a:r>
           </a:p>
         </p:txBody>
@@ -3236,52 +3240,67 @@
                   <a:srgbClr val="22282E"/>
                 </a:solidFill>
               </a:rPr>
-              <a:t>•  Entregar el borrador de la IA sin revisar — Puede contener hallazgos alucinados. Verifica todo.</a:t>
-            </a:r>
-          </a:p>
-          <a:p>
-            <a:pPr>
-              <a:spcAft>
-                <a:spcPts val="600"/>
-              </a:spcAft>
-            </a:pPr>
-            <a:r>
-              <a:rPr sz="1500">
-                <a:solidFill>
-                  <a:srgbClr val="22282E"/>
-                </a:solidFill>
-              </a:rPr>
-              <a:t>•  Informe técnico para la dirección — Audiencia equivocada. Separa ejecutivo y técnico.</a:t>
-            </a:r>
-          </a:p>
-          <a:p>
-            <a:pPr>
-              <a:spcAft>
-                <a:spcPts val="600"/>
-              </a:spcAft>
-            </a:pPr>
-            <a:r>
-              <a:rPr sz="1500">
-                <a:solidFill>
-                  <a:srgbClr val="22282E"/>
-                </a:solidFill>
-              </a:rPr>
-              <a:t>•  Hallazgos sin evidencia — No los incluyas; sin evidencia no hay hallazgo.</a:t>
-            </a:r>
-          </a:p>
-          <a:p>
-            <a:pPr>
-              <a:spcAft>
-                <a:spcPts val="600"/>
-              </a:spcAft>
-            </a:pPr>
-            <a:r>
-              <a:rPr sz="1500">
-                <a:solidFill>
-                  <a:srgbClr val="22282E"/>
-                </a:solidFill>
-              </a:rPr>
-              <a:t>•  Cifras/severidades inventadas — Calcula el CVSS tú y verifícalo (clase 085).</a:t>
+              <a:t>•  Borrador. Genera con IA un informe a partir de los hallazgos de tu sesión de laboratorio.</a:t>
+            </a:r>
+          </a:p>
+          <a:p>
+            <a:pPr>
+              <a:spcAft>
+                <a:spcPts val="600"/>
+              </a:spcAft>
+            </a:pPr>
+            <a:r>
+              <a:rPr sz="1500">
+                <a:solidFill>
+                  <a:srgbClr val="22282E"/>
+                </a:solidFill>
+              </a:rPr>
+              <a:t>•  Verificación. Para cada hallazgo, localiza la evidencia que lo respalda. Marca los que no puedes respaldar.</a:t>
+            </a:r>
+          </a:p>
+          <a:p>
+            <a:pPr>
+              <a:spcAft>
+                <a:spcPts val="600"/>
+              </a:spcAft>
+            </a:pPr>
+            <a:r>
+              <a:rPr sz="1500">
+                <a:solidFill>
+                  <a:srgbClr val="22282E"/>
+                </a:solidFill>
+              </a:rPr>
+              <a:t>•  Depuración. Elimina o corrige los hallazgos sin evidencia (alucinaciones).</a:t>
+            </a:r>
+          </a:p>
+          <a:p>
+            <a:pPr>
+              <a:spcAft>
+                <a:spcPts val="600"/>
+              </a:spcAft>
+            </a:pPr>
+            <a:r>
+              <a:rPr sz="1500">
+                <a:solidFill>
+                  <a:srgbClr val="22282E"/>
+                </a:solidFill>
+              </a:rPr>
+              <a:t>•  Dos audiencias. Pide a la IA un resumen ejecutivo (sin jerga) y una sección técnica del mismo hallazgo.</a:t>
+            </a:r>
+          </a:p>
+          <a:p>
+            <a:pPr>
+              <a:spcAft>
+                <a:spcPts val="600"/>
+              </a:spcAft>
+            </a:pPr>
+            <a:r>
+              <a:rPr sz="1500">
+                <a:solidFill>
+                  <a:srgbClr val="22282E"/>
+                </a:solidFill>
+              </a:rPr>
+              <a:t>•  Plantilla. Define una plantilla reutilizable y comprueba que el informe la respeta.</a:t>
             </a:r>
           </a:p>
         </p:txBody>
@@ -3332,7 +3351,7 @@
                   <a:srgbClr val="0B3D2E"/>
                 </a:solidFill>
               </a:rPr>
-              <a:t>❓ Preguntas frecuentes</a:t>
+              <a:t>✍️ Ejercicios</a:t>
             </a:r>
           </a:p>
         </p:txBody>
@@ -3370,82 +3389,67 @@
                   <a:srgbClr val="22282E"/>
                 </a:solidFill>
               </a:rPr>
-              <a:t>•  ❓ ¿Puedo dejar que la IA escriba todo el informe?</a:t>
-            </a:r>
-          </a:p>
-          <a:p>
-            <a:pPr>
-              <a:spcAft>
-                <a:spcPts val="600"/>
-              </a:spcAft>
-            </a:pPr>
-            <a:r>
-              <a:rPr sz="1500">
-                <a:solidFill>
-                  <a:srgbClr val="22282E"/>
-                </a:solidFill>
-              </a:rPr>
-              <a:t>•  El borrador sí; el entregable final, no, sin tu verificación. Firmas tú, y la responsabilidad</a:t>
-            </a:r>
-          </a:p>
-          <a:p>
-            <a:pPr>
-              <a:spcAft>
-                <a:spcPts val="600"/>
-              </a:spcAft>
-            </a:pPr>
-            <a:r>
-              <a:rPr sz="1500">
-                <a:solidFill>
-                  <a:srgbClr val="22282E"/>
-                </a:solidFill>
-              </a:rPr>
-              <a:t>•  por lo que afirma el documento es tuya.</a:t>
-            </a:r>
-          </a:p>
-          <a:p>
-            <a:pPr>
-              <a:spcAft>
-                <a:spcPts val="600"/>
-              </a:spcAft>
-            </a:pPr>
-            <a:r>
-              <a:rPr sz="1500">
-                <a:solidFill>
-                  <a:srgbClr val="22282E"/>
-                </a:solidFill>
-              </a:rPr>
-              <a:t>•  ❓ ¿Cómo evito que invente hallazgos?</a:t>
-            </a:r>
-          </a:p>
-          <a:p>
-            <a:pPr>
-              <a:spcAft>
-                <a:spcPts val="600"/>
-              </a:spcAft>
-            </a:pPr>
-            <a:r>
-              <a:rPr sz="1500">
-                <a:solidFill>
-                  <a:srgbClr val="22282E"/>
-                </a:solidFill>
-              </a:rPr>
-              <a:t>•  Trabaja con trazabilidad: obliga a que cada afirmación cite su evidencia y elimina lo que no</a:t>
-            </a:r>
-          </a:p>
-          <a:p>
-            <a:pPr>
-              <a:spcAft>
-                <a:spcPts val="600"/>
-              </a:spcAft>
-            </a:pPr>
-            <a:r>
-              <a:rPr sz="1500">
-                <a:solidFill>
-                  <a:srgbClr val="22282E"/>
-                </a:solidFill>
-              </a:rPr>
-              <a:t>•  puedas respaldar con la salida real de una herramienta.</a:t>
+              <a:t>•  ¿Por qué la IA es buena redactando pero peligrosa como fuente de hechos?</a:t>
+            </a:r>
+          </a:p>
+          <a:p>
+            <a:pPr>
+              <a:spcAft>
+                <a:spcPts val="600"/>
+              </a:spcAft>
+            </a:pPr>
+            <a:r>
+              <a:rPr sz="1500">
+                <a:solidFill>
+                  <a:srgbClr val="22282E"/>
+                </a:solidFill>
+              </a:rPr>
+              <a:t>•  Diseña la tabla "hallazgo → evidencia" para verificar un informe.</a:t>
+            </a:r>
+          </a:p>
+          <a:p>
+            <a:pPr>
+              <a:spcAft>
+                <a:spcPts val="600"/>
+              </a:spcAft>
+            </a:pPr>
+            <a:r>
+              <a:rPr sz="1500">
+                <a:solidFill>
+                  <a:srgbClr val="22282E"/>
+                </a:solidFill>
+              </a:rPr>
+              <a:t>•  Reescribe un hallazgo técnico como resumen ejecutivo.</a:t>
+            </a:r>
+          </a:p>
+          <a:p>
+            <a:pPr>
+              <a:spcAft>
+                <a:spcPts val="600"/>
+              </a:spcAft>
+            </a:pPr>
+            <a:r>
+              <a:rPr sz="1500">
+                <a:solidFill>
+                  <a:srgbClr val="22282E"/>
+                </a:solidFill>
+              </a:rPr>
+              <a:t>•  ¿Qué revisarías siempre antes de entregar un informe generado con IA?</a:t>
+            </a:r>
+          </a:p>
+          <a:p>
+            <a:pPr>
+              <a:spcAft>
+                <a:spcPts val="600"/>
+              </a:spcAft>
+            </a:pPr>
+            <a:r>
+              <a:rPr sz="1500">
+                <a:solidFill>
+                  <a:srgbClr val="22282E"/>
+                </a:solidFill>
+              </a:rPr>
+              <a:t>•  Crea una plantilla mínima de informe de pentest.</a:t>
             </a:r>
           </a:p>
         </p:txBody>
@@ -3496,7 +3500,7 @@
                   <a:srgbClr val="0B3D2E"/>
                 </a:solidFill>
               </a:rPr>
-              <a:t>🔗 Referencias</a:t>
+              <a:t>📝 Reto verificable</a:t>
             </a:r>
           </a:p>
         </p:txBody>
@@ -3534,6 +3538,438 @@
                   <a:srgbClr val="22282E"/>
                 </a:solidFill>
               </a:rPr>
+              <a:t>•  Genera un mini-informe con IA de tu sesión y entrégalo solo con hallazgos verificados,</a:t>
+            </a:r>
+          </a:p>
+          <a:p>
+            <a:pPr>
+              <a:spcAft>
+                <a:spcPts val="600"/>
+              </a:spcAft>
+            </a:pPr>
+            <a:r>
+              <a:rPr sz="1500">
+                <a:solidFill>
+                  <a:srgbClr val="22282E"/>
+                </a:solidFill>
+              </a:rPr>
+              <a:t>•  documentando qué eliminaste por falta de evidencia.</a:t>
+            </a:r>
+          </a:p>
+          <a:p>
+            <a:pPr>
+              <a:spcAft>
+                <a:spcPts val="600"/>
+              </a:spcAft>
+            </a:pPr>
+            <a:r>
+              <a:rPr sz="1500">
+                <a:solidFill>
+                  <a:srgbClr val="22282E"/>
+                </a:solidFill>
+              </a:rPr>
+              <a:t>•  Criterio de aceptación: cada hallazgo del informe final tiene evidencia reproducible;</a:t>
+            </a:r>
+          </a:p>
+          <a:p>
+            <a:pPr>
+              <a:spcAft>
+                <a:spcPts val="600"/>
+              </a:spcAft>
+            </a:pPr>
+            <a:r>
+              <a:rPr sz="1500">
+                <a:solidFill>
+                  <a:srgbClr val="22282E"/>
+                </a:solidFill>
+              </a:rPr>
+              <a:t>•  listas explícitamente lo que descartaste; el resumen ejecutivo no tiene jerga.</a:t>
+            </a:r>
+          </a:p>
+        </p:txBody>
+      </p:sp>
+    </p:spTree>
+  </p:cSld>
+  <p:clrMapOvr>
+    <a:masterClrMapping/>
+  </p:clrMapOvr>
+</p:sld>
+</file>
+
+<file path=ppt/slides/slide13.xml><?xml version="1.0" encoding="utf-8"?>
+<p:sld xmlns:a="http://schemas.openxmlformats.org/drawingml/2006/main" xmlns:p="http://schemas.openxmlformats.org/presentationml/2006/main" xmlns:r="http://schemas.openxmlformats.org/officeDocument/2006/relationships">
+  <p:cSld>
+    <p:spTree>
+      <p:nvGrpSpPr>
+        <p:cNvPr id="1" name=""/>
+        <p:cNvGrpSpPr/>
+        <p:nvPr/>
+      </p:nvGrpSpPr>
+      <p:grpSpPr/>
+      <p:sp>
+        <p:nvSpPr>
+          <p:cNvPr id="2" name="TextBox 1"/>
+          <p:cNvSpPr txBox="1"/>
+          <p:nvPr/>
+        </p:nvSpPr>
+        <p:spPr>
+          <a:xfrm>
+            <a:off x="457200" y="320040"/>
+            <a:ext cx="8229600" cy="822960"/>
+          </a:xfrm>
+          <a:prstGeom prst="rect">
+            <a:avLst/>
+          </a:prstGeom>
+          <a:noFill/>
+        </p:spPr>
+        <p:txBody>
+          <a:bodyPr wrap="square">
+            <a:spAutoFit/>
+          </a:bodyPr>
+          <a:lstStyle/>
+          <a:p>
+            <a:r>
+              <a:rPr sz="2600" b="1">
+                <a:solidFill>
+                  <a:srgbClr val="0B3D2E"/>
+                </a:solidFill>
+              </a:rPr>
+              <a:t>⚠️ Errores comunes</a:t>
+            </a:r>
+          </a:p>
+        </p:txBody>
+      </p:sp>
+      <p:sp>
+        <p:nvSpPr>
+          <p:cNvPr id="3" name="TextBox 2"/>
+          <p:cNvSpPr txBox="1"/>
+          <p:nvPr/>
+        </p:nvSpPr>
+        <p:spPr>
+          <a:xfrm>
+            <a:off x="457200" y="1280160"/>
+            <a:ext cx="8229600" cy="4937760"/>
+          </a:xfrm>
+          <a:prstGeom prst="rect">
+            <a:avLst/>
+          </a:prstGeom>
+          <a:noFill/>
+        </p:spPr>
+        <p:txBody>
+          <a:bodyPr wrap="square">
+            <a:spAutoFit/>
+          </a:bodyPr>
+          <a:lstStyle/>
+          <a:p>
+            <a:pPr>
+              <a:spcAft>
+                <a:spcPts val="600"/>
+              </a:spcAft>
+            </a:pPr>
+            <a:r>
+              <a:rPr sz="1500">
+                <a:solidFill>
+                  <a:srgbClr val="22282E"/>
+                </a:solidFill>
+              </a:rPr>
+              <a:t>•  Entregar el borrador de la IA sin revisar — Puede contener hallazgos alucinados. Verifica todo.</a:t>
+            </a:r>
+          </a:p>
+          <a:p>
+            <a:pPr>
+              <a:spcAft>
+                <a:spcPts val="600"/>
+              </a:spcAft>
+            </a:pPr>
+            <a:r>
+              <a:rPr sz="1500">
+                <a:solidFill>
+                  <a:srgbClr val="22282E"/>
+                </a:solidFill>
+              </a:rPr>
+              <a:t>•  Informe técnico para la dirección — Audiencia equivocada. Separa ejecutivo y técnico.</a:t>
+            </a:r>
+          </a:p>
+          <a:p>
+            <a:pPr>
+              <a:spcAft>
+                <a:spcPts val="600"/>
+              </a:spcAft>
+            </a:pPr>
+            <a:r>
+              <a:rPr sz="1500">
+                <a:solidFill>
+                  <a:srgbClr val="22282E"/>
+                </a:solidFill>
+              </a:rPr>
+              <a:t>•  Hallazgos sin evidencia — No los incluyas; sin evidencia no hay hallazgo.</a:t>
+            </a:r>
+          </a:p>
+          <a:p>
+            <a:pPr>
+              <a:spcAft>
+                <a:spcPts val="600"/>
+              </a:spcAft>
+            </a:pPr>
+            <a:r>
+              <a:rPr sz="1500">
+                <a:solidFill>
+                  <a:srgbClr val="22282E"/>
+                </a:solidFill>
+              </a:rPr>
+              <a:t>•  Cifras/severidades inventadas — Calcula el CVSS tú y verifícalo (clase 085).</a:t>
+            </a:r>
+          </a:p>
+        </p:txBody>
+      </p:sp>
+    </p:spTree>
+  </p:cSld>
+  <p:clrMapOvr>
+    <a:masterClrMapping/>
+  </p:clrMapOvr>
+</p:sld>
+</file>
+
+<file path=ppt/slides/slide14.xml><?xml version="1.0" encoding="utf-8"?>
+<p:sld xmlns:a="http://schemas.openxmlformats.org/drawingml/2006/main" xmlns:p="http://schemas.openxmlformats.org/presentationml/2006/main" xmlns:r="http://schemas.openxmlformats.org/officeDocument/2006/relationships">
+  <p:cSld>
+    <p:spTree>
+      <p:nvGrpSpPr>
+        <p:cNvPr id="1" name=""/>
+        <p:cNvGrpSpPr/>
+        <p:nvPr/>
+      </p:nvGrpSpPr>
+      <p:grpSpPr/>
+      <p:sp>
+        <p:nvSpPr>
+          <p:cNvPr id="2" name="TextBox 1"/>
+          <p:cNvSpPr txBox="1"/>
+          <p:nvPr/>
+        </p:nvSpPr>
+        <p:spPr>
+          <a:xfrm>
+            <a:off x="457200" y="320040"/>
+            <a:ext cx="8229600" cy="822960"/>
+          </a:xfrm>
+          <a:prstGeom prst="rect">
+            <a:avLst/>
+          </a:prstGeom>
+          <a:noFill/>
+        </p:spPr>
+        <p:txBody>
+          <a:bodyPr wrap="square">
+            <a:spAutoFit/>
+          </a:bodyPr>
+          <a:lstStyle/>
+          <a:p>
+            <a:r>
+              <a:rPr sz="2600" b="1">
+                <a:solidFill>
+                  <a:srgbClr val="0B3D2E"/>
+                </a:solidFill>
+              </a:rPr>
+              <a:t>❓ Preguntas frecuentes</a:t>
+            </a:r>
+          </a:p>
+        </p:txBody>
+      </p:sp>
+      <p:sp>
+        <p:nvSpPr>
+          <p:cNvPr id="3" name="TextBox 2"/>
+          <p:cNvSpPr txBox="1"/>
+          <p:nvPr/>
+        </p:nvSpPr>
+        <p:spPr>
+          <a:xfrm>
+            <a:off x="457200" y="1280160"/>
+            <a:ext cx="8229600" cy="4937760"/>
+          </a:xfrm>
+          <a:prstGeom prst="rect">
+            <a:avLst/>
+          </a:prstGeom>
+          <a:noFill/>
+        </p:spPr>
+        <p:txBody>
+          <a:bodyPr wrap="square">
+            <a:spAutoFit/>
+          </a:bodyPr>
+          <a:lstStyle/>
+          <a:p>
+            <a:pPr>
+              <a:spcAft>
+                <a:spcPts val="600"/>
+              </a:spcAft>
+            </a:pPr>
+            <a:r>
+              <a:rPr sz="1500">
+                <a:solidFill>
+                  <a:srgbClr val="22282E"/>
+                </a:solidFill>
+              </a:rPr>
+              <a:t>•  ❓ ¿Puedo dejar que la IA escriba todo el informe?</a:t>
+            </a:r>
+          </a:p>
+          <a:p>
+            <a:pPr>
+              <a:spcAft>
+                <a:spcPts val="600"/>
+              </a:spcAft>
+            </a:pPr>
+            <a:r>
+              <a:rPr sz="1500">
+                <a:solidFill>
+                  <a:srgbClr val="22282E"/>
+                </a:solidFill>
+              </a:rPr>
+              <a:t>•  El borrador sí; el entregable final, no, sin tu verificación. Firmas tú, y la responsabilidad</a:t>
+            </a:r>
+          </a:p>
+          <a:p>
+            <a:pPr>
+              <a:spcAft>
+                <a:spcPts val="600"/>
+              </a:spcAft>
+            </a:pPr>
+            <a:r>
+              <a:rPr sz="1500">
+                <a:solidFill>
+                  <a:srgbClr val="22282E"/>
+                </a:solidFill>
+              </a:rPr>
+              <a:t>•  por lo que afirma el documento es tuya.</a:t>
+            </a:r>
+          </a:p>
+          <a:p>
+            <a:pPr>
+              <a:spcAft>
+                <a:spcPts val="600"/>
+              </a:spcAft>
+            </a:pPr>
+            <a:r>
+              <a:rPr sz="1500">
+                <a:solidFill>
+                  <a:srgbClr val="22282E"/>
+                </a:solidFill>
+              </a:rPr>
+              <a:t>•  ❓ ¿Cómo evito que invente hallazgos?</a:t>
+            </a:r>
+          </a:p>
+          <a:p>
+            <a:pPr>
+              <a:spcAft>
+                <a:spcPts val="600"/>
+              </a:spcAft>
+            </a:pPr>
+            <a:r>
+              <a:rPr sz="1500">
+                <a:solidFill>
+                  <a:srgbClr val="22282E"/>
+                </a:solidFill>
+              </a:rPr>
+              <a:t>•  Trabaja con trazabilidad: obliga a que cada afirmación cite su evidencia y elimina lo que no</a:t>
+            </a:r>
+          </a:p>
+          <a:p>
+            <a:pPr>
+              <a:spcAft>
+                <a:spcPts val="600"/>
+              </a:spcAft>
+            </a:pPr>
+            <a:r>
+              <a:rPr sz="1500">
+                <a:solidFill>
+                  <a:srgbClr val="22282E"/>
+                </a:solidFill>
+              </a:rPr>
+              <a:t>•  puedas respaldar con la salida real de una herramienta.</a:t>
+            </a:r>
+          </a:p>
+        </p:txBody>
+      </p:sp>
+    </p:spTree>
+  </p:cSld>
+  <p:clrMapOvr>
+    <a:masterClrMapping/>
+  </p:clrMapOvr>
+</p:sld>
+</file>
+
+<file path=ppt/slides/slide15.xml><?xml version="1.0" encoding="utf-8"?>
+<p:sld xmlns:a="http://schemas.openxmlformats.org/drawingml/2006/main" xmlns:p="http://schemas.openxmlformats.org/presentationml/2006/main" xmlns:r="http://schemas.openxmlformats.org/officeDocument/2006/relationships">
+  <p:cSld>
+    <p:spTree>
+      <p:nvGrpSpPr>
+        <p:cNvPr id="1" name=""/>
+        <p:cNvGrpSpPr/>
+        <p:nvPr/>
+      </p:nvGrpSpPr>
+      <p:grpSpPr/>
+      <p:sp>
+        <p:nvSpPr>
+          <p:cNvPr id="2" name="TextBox 1"/>
+          <p:cNvSpPr txBox="1"/>
+          <p:nvPr/>
+        </p:nvSpPr>
+        <p:spPr>
+          <a:xfrm>
+            <a:off x="457200" y="320040"/>
+            <a:ext cx="8229600" cy="822960"/>
+          </a:xfrm>
+          <a:prstGeom prst="rect">
+            <a:avLst/>
+          </a:prstGeom>
+          <a:noFill/>
+        </p:spPr>
+        <p:txBody>
+          <a:bodyPr wrap="square">
+            <a:spAutoFit/>
+          </a:bodyPr>
+          <a:lstStyle/>
+          <a:p>
+            <a:r>
+              <a:rPr sz="2600" b="1">
+                <a:solidFill>
+                  <a:srgbClr val="0B3D2E"/>
+                </a:solidFill>
+              </a:rPr>
+              <a:t>🔗 Referencias</a:t>
+            </a:r>
+          </a:p>
+        </p:txBody>
+      </p:sp>
+      <p:sp>
+        <p:nvSpPr>
+          <p:cNvPr id="3" name="TextBox 2"/>
+          <p:cNvSpPr txBox="1"/>
+          <p:nvPr/>
+        </p:nvSpPr>
+        <p:spPr>
+          <a:xfrm>
+            <a:off x="457200" y="1280160"/>
+            <a:ext cx="8229600" cy="4937760"/>
+          </a:xfrm>
+          <a:prstGeom prst="rect">
+            <a:avLst/>
+          </a:prstGeom>
+          <a:noFill/>
+        </p:spPr>
+        <p:txBody>
+          <a:bodyPr wrap="square">
+            <a:spAutoFit/>
+          </a:bodyPr>
+          <a:lstStyle/>
+          <a:p>
+            <a:pPr>
+              <a:spcAft>
+                <a:spcPts val="600"/>
+              </a:spcAft>
+            </a:pPr>
+            <a:r>
+              <a:rPr sz="1500">
+                <a:solidFill>
+                  <a:srgbClr val="22282E"/>
+                </a:solidFill>
+              </a:rPr>
               <a:t>•  PTES — Reporting · FIRST CVSS</a:t>
             </a:r>
           </a:p>
@@ -3569,6 +4005,81 @@
           </a:p>
         </p:txBody>
       </p:sp>
+    </p:spTree>
+  </p:cSld>
+  <p:clrMapOvr>
+    <a:masterClrMapping/>
+  </p:clrMapOvr>
+</p:sld>
+</file>
+
+<file path=ppt/slides/slide16.xml><?xml version="1.0" encoding="utf-8"?>
+<p:sld xmlns:a="http://schemas.openxmlformats.org/drawingml/2006/main" xmlns:p="http://schemas.openxmlformats.org/presentationml/2006/main" xmlns:r="http://schemas.openxmlformats.org/officeDocument/2006/relationships">
+  <p:cSld>
+    <p:spTree>
+      <p:nvGrpSpPr>
+        <p:cNvPr id="1" name=""/>
+        <p:cNvGrpSpPr/>
+        <p:nvPr/>
+      </p:nvGrpSpPr>
+      <p:grpSpPr/>
+      <p:sp>
+        <p:nvSpPr>
+          <p:cNvPr id="2" name="TextBox 1"/>
+          <p:cNvSpPr txBox="1"/>
+          <p:nvPr/>
+        </p:nvSpPr>
+        <p:spPr>
+          <a:xfrm>
+            <a:off x="457200" y="274320"/>
+            <a:ext cx="8229600" cy="640080"/>
+          </a:xfrm>
+          <a:prstGeom prst="rect">
+            <a:avLst/>
+          </a:prstGeom>
+          <a:noFill/>
+        </p:spPr>
+        <p:txBody>
+          <a:bodyPr wrap="square">
+            <a:spAutoFit/>
+          </a:bodyPr>
+          <a:lstStyle/>
+          <a:p>
+            <a:r>
+              <a:rPr sz="2200" b="1">
+                <a:solidFill>
+                  <a:srgbClr val="0B3D2E"/>
+                </a:solidFill>
+              </a:rPr>
+              <a:t>Diagrama de la clase</a:t>
+            </a:r>
+          </a:p>
+        </p:txBody>
+      </p:sp>
+      <p:pic>
+        <p:nvPicPr>
+          <p:cNvPr id="3" name="Picture 2" descr="cb67c7bcc6407a94.png"/>
+          <p:cNvPicPr>
+            <a:picLocks noChangeAspect="1"/>
+          </p:cNvPicPr>
+          <p:nvPr/>
+        </p:nvPicPr>
+        <p:blipFill>
+          <a:blip r:embed="rId2"/>
+          <a:stretch>
+            <a:fillRect/>
+          </a:stretch>
+        </p:blipFill>
+        <p:spPr>
+          <a:xfrm>
+            <a:off x="457200" y="3323581"/>
+            <a:ext cx="8229600" cy="850918"/>
+          </a:xfrm>
+          <a:prstGeom prst="rect">
+            <a:avLst/>
+          </a:prstGeom>
+        </p:spPr>
+      </p:pic>
     </p:spTree>
   </p:cSld>
   <p:clrMapOvr>
@@ -4047,7 +4558,7 @@
                   <a:srgbClr val="0B3D2E"/>
                 </a:solidFill>
               </a:rPr>
-              <a:t>📖 Definiciones y características</a:t>
+              <a:t>🧠 Explicación en profundidad</a:t>
             </a:r>
           </a:p>
         </p:txBody>
@@ -4085,97 +4596,37 @@
                   <a:srgbClr val="22282E"/>
                 </a:solidFill>
               </a:rPr>
-              <a:t>•  Borrador asistido</a:t>
-            </a:r>
-          </a:p>
-          <a:p>
-            <a:pPr>
-              <a:spcAft>
-                <a:spcPts val="600"/>
-              </a:spcAft>
-            </a:pPr>
-            <a:r>
-              <a:rPr sz="1500">
-                <a:solidFill>
-                  <a:srgbClr val="22282E"/>
-                </a:solidFill>
-              </a:rPr>
-              <a:t>•  Primer informe generado por IA a partir de los datos de la sesión; es un punto de partida, no el entregable final.</a:t>
-            </a:r>
-          </a:p>
-          <a:p>
-            <a:pPr>
-              <a:spcAft>
-                <a:spcPts val="600"/>
-              </a:spcAft>
-            </a:pPr>
-            <a:r>
-              <a:rPr sz="1500">
-                <a:solidFill>
-                  <a:srgbClr val="22282E"/>
-                </a:solidFill>
-              </a:rPr>
-              <a:t>•  Hallazgo alucinado</a:t>
-            </a:r>
-          </a:p>
-          <a:p>
-            <a:pPr>
-              <a:spcAft>
-                <a:spcPts val="600"/>
-              </a:spcAft>
-            </a:pPr>
-            <a:r>
-              <a:rPr sz="1500">
-                <a:solidFill>
-                  <a:srgbClr val="22282E"/>
-                </a:solidFill>
-              </a:rPr>
-              <a:t>•  Vulnerabilidad que la IA describe pero que no existe o no se demostró. Incluirlo en un informe es un fallo grave de credibilidad y responsabilidad.</a:t>
-            </a:r>
-          </a:p>
-          <a:p>
-            <a:pPr>
-              <a:spcAft>
-                <a:spcPts val="600"/>
-              </a:spcAft>
-            </a:pPr>
-            <a:r>
-              <a:rPr sz="1500">
-                <a:solidFill>
-                  <a:srgbClr val="22282E"/>
-                </a:solidFill>
-              </a:rPr>
-              <a:t>•  Trazabilidad hallazgo→evidencia</a:t>
-            </a:r>
-          </a:p>
-          <a:p>
-            <a:pPr>
-              <a:spcAft>
-                <a:spcPts val="600"/>
-              </a:spcAft>
-            </a:pPr>
-            <a:r>
-              <a:rPr sz="1500">
-                <a:solidFill>
-                  <a:srgbClr val="22282E"/>
-                </a:solidFill>
-              </a:rPr>
-              <a:t>•  Cada afirmación del informe debe enlazar con la evidencia (comando, captura, log) que la respalda.</a:t>
-            </a:r>
-          </a:p>
-          <a:p>
-            <a:pPr>
-              <a:spcAft>
-                <a:spcPts val="600"/>
-              </a:spcAft>
-            </a:pPr>
-            <a:r>
-              <a:rPr sz="1500">
-                <a:solidFill>
-                  <a:srgbClr val="22282E"/>
-                </a:solidFill>
-              </a:rPr>
-              <a:t>•  Plantilla de informe</a:t>
+              <a:t>•  Generar informes exige separar hechos, inferencias y redacción. La IA transforma evidencia sanitizada bajo una plantilla; el revisor valida cada hallazgo, severidad, alcance y recomendación antes de…</a:t>
+            </a:r>
+          </a:p>
+          <a:p>
+            <a:pPr>
+              <a:spcAft>
+                <a:spcPts val="600"/>
+              </a:spcAft>
+            </a:pPr>
+            <a:r>
+              <a:rPr sz="1500">
+                <a:solidFill>
+                  <a:srgbClr val="22282E"/>
+                </a:solidFill>
+              </a:rPr>
+              <a:t>•  El diagrama separa lenguaje de autoridad. El modelo puede proponer; la política determina si la operación pertenece al alcance; la herramienta produce evidencia; y una persona o control determinista…</a:t>
+            </a:r>
+          </a:p>
+          <a:p>
+            <a:pPr>
+              <a:spcAft>
+                <a:spcPts val="600"/>
+              </a:spcAft>
+            </a:pPr>
+            <a:r>
+              <a:rPr sz="1500">
+                <a:solidFill>
+                  <a:srgbClr val="22282E"/>
+                </a:solidFill>
+              </a:rPr>
+              <a:t>•  El borrador afirma exfiltración donde solo hubo acceso. La revisión reduce el lenguaje al efecto demostrado.</a:t>
             </a:r>
           </a:p>
         </p:txBody>
@@ -4226,7 +4677,7 @@
                   <a:srgbClr val="0B3D2E"/>
                 </a:solidFill>
               </a:rPr>
-              <a:t>🧰 Herramientas y preparación</a:t>
+              <a:t>📔 Glosario operativo</a:t>
             </a:r>
           </a:p>
         </p:txBody>
@@ -4264,22 +4715,52 @@
                   <a:srgbClr val="22282E"/>
                 </a:solidFill>
               </a:rPr>
-              <a:t>•  Los datos de una sesión de laboratorio (de las clases 333–336) y un LLM. Ten a mano la evidencia</a:t>
-            </a:r>
-          </a:p>
-          <a:p>
-            <a:pPr>
-              <a:spcAft>
-                <a:spcPts val="600"/>
-              </a:spcAft>
-            </a:pPr>
-            <a:r>
-              <a:rPr sz="1500">
-                <a:solidFill>
-                  <a:srgbClr val="22282E"/>
-                </a:solidFill>
-              </a:rPr>
-              <a:t>•  cruda para verificar lo que el informe afirme.</a:t>
+              <a:t>•  Término — Definición</a:t>
+            </a:r>
+          </a:p>
+          <a:p>
+            <a:pPr>
+              <a:spcAft>
+                <a:spcPts val="600"/>
+              </a:spcAft>
+            </a:pPr>
+            <a:r>
+              <a:rPr sz="1500">
+                <a:solidFill>
+                  <a:srgbClr val="22282E"/>
+                </a:solidFill>
+              </a:rPr>
+              <a:t>•  Provenance de informe — Relación entre afirmación, fuente, transformación y aprobador.</a:t>
+            </a:r>
+          </a:p>
+          <a:p>
+            <a:pPr>
+              <a:spcAft>
+                <a:spcPts val="600"/>
+              </a:spcAft>
+            </a:pPr>
+            <a:r>
+              <a:rPr sz="1500">
+                <a:solidFill>
+                  <a:srgbClr val="22282E"/>
+                </a:solidFill>
+              </a:rPr>
+              <a:t>•  Guardrail — Capa que reduce una capacidad o detecta su uso; no garantía absoluta.</a:t>
+            </a:r>
+          </a:p>
+          <a:p>
+            <a:pPr>
+              <a:spcAft>
+                <a:spcPts val="600"/>
+              </a:spcAft>
+            </a:pPr>
+            <a:r>
+              <a:rPr sz="1500">
+                <a:solidFill>
+                  <a:srgbClr val="22282E"/>
+                </a:solidFill>
+              </a:rPr>
+              <a:t>•  Audit trail — Registro ordenado de solicitudes, decisiones, ejecuciones y resultados.</a:t>
             </a:r>
           </a:p>
         </p:txBody>
@@ -4330,7 +4811,7 @@
                   <a:srgbClr val="0B3D2E"/>
                 </a:solidFill>
               </a:rPr>
-              <a:t>🧪 Laboratorio guiado</a:t>
+              <a:t>✅ Criterio de dominio</a:t>
             </a:r>
           </a:p>
         </p:txBody>
@@ -4368,67 +4849,7 @@
                   <a:srgbClr val="22282E"/>
                 </a:solidFill>
               </a:rPr>
-              <a:t>•  Borrador. Genera con IA un informe a partir de los hallazgos de tu sesión de laboratorio.</a:t>
-            </a:r>
-          </a:p>
-          <a:p>
-            <a:pPr>
-              <a:spcAft>
-                <a:spcPts val="600"/>
-              </a:spcAft>
-            </a:pPr>
-            <a:r>
-              <a:rPr sz="1500">
-                <a:solidFill>
-                  <a:srgbClr val="22282E"/>
-                </a:solidFill>
-              </a:rPr>
-              <a:t>•  Verificación. Para cada hallazgo, localiza la evidencia que lo respalda. Marca los que no puedes respaldar.</a:t>
-            </a:r>
-          </a:p>
-          <a:p>
-            <a:pPr>
-              <a:spcAft>
-                <a:spcPts val="600"/>
-              </a:spcAft>
-            </a:pPr>
-            <a:r>
-              <a:rPr sz="1500">
-                <a:solidFill>
-                  <a:srgbClr val="22282E"/>
-                </a:solidFill>
-              </a:rPr>
-              <a:t>•  Depuración. Elimina o corrige los hallazgos sin evidencia (alucinaciones).</a:t>
-            </a:r>
-          </a:p>
-          <a:p>
-            <a:pPr>
-              <a:spcAft>
-                <a:spcPts val="600"/>
-              </a:spcAft>
-            </a:pPr>
-            <a:r>
-              <a:rPr sz="1500">
-                <a:solidFill>
-                  <a:srgbClr val="22282E"/>
-                </a:solidFill>
-              </a:rPr>
-              <a:t>•  Dos audiencias. Pide a la IA un resumen ejecutivo (sin jerga) y una sección técnica del mismo hallazgo.</a:t>
-            </a:r>
-          </a:p>
-          <a:p>
-            <a:pPr>
-              <a:spcAft>
-                <a:spcPts val="600"/>
-              </a:spcAft>
-            </a:pPr>
-            <a:r>
-              <a:rPr sz="1500">
-                <a:solidFill>
-                  <a:srgbClr val="22282E"/>
-                </a:solidFill>
-              </a:rPr>
-              <a:t>•  Plantilla. Define una plantilla reutilizable y comprueba que el informe la respeta.</a:t>
+              <a:t>•  El alumno demuestra dominio cuando reproduce el flujo completo, puede atribuir cada acción, evita que texto no confiable otorgue autoridad y explica qué control contiene un fallo del modelo.</a:t>
             </a:r>
           </a:p>
         </p:txBody>
@@ -4479,7 +4900,7 @@
                   <a:srgbClr val="0B3D2E"/>
                 </a:solidFill>
               </a:rPr>
-              <a:t>✍️ Ejercicios</a:t>
+              <a:t>📖 Definiciones y características</a:t>
             </a:r>
           </a:p>
         </p:txBody>
@@ -4517,67 +4938,97 @@
                   <a:srgbClr val="22282E"/>
                 </a:solidFill>
               </a:rPr>
-              <a:t>•  ¿Por qué la IA es buena redactando pero peligrosa como fuente de hechos?</a:t>
-            </a:r>
-          </a:p>
-          <a:p>
-            <a:pPr>
-              <a:spcAft>
-                <a:spcPts val="600"/>
-              </a:spcAft>
-            </a:pPr>
-            <a:r>
-              <a:rPr sz="1500">
-                <a:solidFill>
-                  <a:srgbClr val="22282E"/>
-                </a:solidFill>
-              </a:rPr>
-              <a:t>•  Diseña la tabla "hallazgo → evidencia" para verificar un informe.</a:t>
-            </a:r>
-          </a:p>
-          <a:p>
-            <a:pPr>
-              <a:spcAft>
-                <a:spcPts val="600"/>
-              </a:spcAft>
-            </a:pPr>
-            <a:r>
-              <a:rPr sz="1500">
-                <a:solidFill>
-                  <a:srgbClr val="22282E"/>
-                </a:solidFill>
-              </a:rPr>
-              <a:t>•  Reescribe un hallazgo técnico como resumen ejecutivo.</a:t>
-            </a:r>
-          </a:p>
-          <a:p>
-            <a:pPr>
-              <a:spcAft>
-                <a:spcPts val="600"/>
-              </a:spcAft>
-            </a:pPr>
-            <a:r>
-              <a:rPr sz="1500">
-                <a:solidFill>
-                  <a:srgbClr val="22282E"/>
-                </a:solidFill>
-              </a:rPr>
-              <a:t>•  ¿Qué revisarías siempre antes de entregar un informe generado con IA?</a:t>
-            </a:r>
-          </a:p>
-          <a:p>
-            <a:pPr>
-              <a:spcAft>
-                <a:spcPts val="600"/>
-              </a:spcAft>
-            </a:pPr>
-            <a:r>
-              <a:rPr sz="1500">
-                <a:solidFill>
-                  <a:srgbClr val="22282E"/>
-                </a:solidFill>
-              </a:rPr>
-              <a:t>•  Crea una plantilla mínima de informe de pentest.</a:t>
+              <a:t>•  Borrador asistido</a:t>
+            </a:r>
+          </a:p>
+          <a:p>
+            <a:pPr>
+              <a:spcAft>
+                <a:spcPts val="600"/>
+              </a:spcAft>
+            </a:pPr>
+            <a:r>
+              <a:rPr sz="1500">
+                <a:solidFill>
+                  <a:srgbClr val="22282E"/>
+                </a:solidFill>
+              </a:rPr>
+              <a:t>•  Primer informe generado por IA a partir de los datos de la sesión; es un punto de partida, no el entregable final.</a:t>
+            </a:r>
+          </a:p>
+          <a:p>
+            <a:pPr>
+              <a:spcAft>
+                <a:spcPts val="600"/>
+              </a:spcAft>
+            </a:pPr>
+            <a:r>
+              <a:rPr sz="1500">
+                <a:solidFill>
+                  <a:srgbClr val="22282E"/>
+                </a:solidFill>
+              </a:rPr>
+              <a:t>•  Hallazgo alucinado</a:t>
+            </a:r>
+          </a:p>
+          <a:p>
+            <a:pPr>
+              <a:spcAft>
+                <a:spcPts val="600"/>
+              </a:spcAft>
+            </a:pPr>
+            <a:r>
+              <a:rPr sz="1500">
+                <a:solidFill>
+                  <a:srgbClr val="22282E"/>
+                </a:solidFill>
+              </a:rPr>
+              <a:t>•  Vulnerabilidad que la IA describe pero que no existe o no se demostró. Incluirlo en un informe es un fallo grave de credibilidad y responsabilidad.</a:t>
+            </a:r>
+          </a:p>
+          <a:p>
+            <a:pPr>
+              <a:spcAft>
+                <a:spcPts val="600"/>
+              </a:spcAft>
+            </a:pPr>
+            <a:r>
+              <a:rPr sz="1500">
+                <a:solidFill>
+                  <a:srgbClr val="22282E"/>
+                </a:solidFill>
+              </a:rPr>
+              <a:t>•  Trazabilidad hallazgo→evidencia</a:t>
+            </a:r>
+          </a:p>
+          <a:p>
+            <a:pPr>
+              <a:spcAft>
+                <a:spcPts val="600"/>
+              </a:spcAft>
+            </a:pPr>
+            <a:r>
+              <a:rPr sz="1500">
+                <a:solidFill>
+                  <a:srgbClr val="22282E"/>
+                </a:solidFill>
+              </a:rPr>
+              <a:t>•  Cada afirmación del informe debe enlazar con la evidencia (comando, captura, log) que la respalda.</a:t>
+            </a:r>
+          </a:p>
+          <a:p>
+            <a:pPr>
+              <a:spcAft>
+                <a:spcPts val="600"/>
+              </a:spcAft>
+            </a:pPr>
+            <a:r>
+              <a:rPr sz="1500">
+                <a:solidFill>
+                  <a:srgbClr val="22282E"/>
+                </a:solidFill>
+              </a:rPr>
+              <a:t>•  Plantilla de informe</a:t>
             </a:r>
           </a:p>
         </p:txBody>
@@ -4628,7 +5079,7 @@
                   <a:srgbClr val="0B3D2E"/>
                 </a:solidFill>
               </a:rPr>
-              <a:t>📝 Reto verificable</a:t>
+              <a:t>🧰 Herramientas y preparación</a:t>
             </a:r>
           </a:p>
         </p:txBody>
@@ -4666,52 +5117,22 @@
                   <a:srgbClr val="22282E"/>
                 </a:solidFill>
               </a:rPr>
-              <a:t>•  Genera un mini-informe con IA de tu sesión y entrégalo solo con hallazgos verificados,</a:t>
-            </a:r>
-          </a:p>
-          <a:p>
-            <a:pPr>
-              <a:spcAft>
-                <a:spcPts val="600"/>
-              </a:spcAft>
-            </a:pPr>
-            <a:r>
-              <a:rPr sz="1500">
-                <a:solidFill>
-                  <a:srgbClr val="22282E"/>
-                </a:solidFill>
-              </a:rPr>
-              <a:t>•  documentando qué eliminaste por falta de evidencia.</a:t>
-            </a:r>
-          </a:p>
-          <a:p>
-            <a:pPr>
-              <a:spcAft>
-                <a:spcPts val="600"/>
-              </a:spcAft>
-            </a:pPr>
-            <a:r>
-              <a:rPr sz="1500">
-                <a:solidFill>
-                  <a:srgbClr val="22282E"/>
-                </a:solidFill>
-              </a:rPr>
-              <a:t>•  Criterio de aceptación: cada hallazgo del informe final tiene evidencia reproducible;</a:t>
-            </a:r>
-          </a:p>
-          <a:p>
-            <a:pPr>
-              <a:spcAft>
-                <a:spcPts val="600"/>
-              </a:spcAft>
-            </a:pPr>
-            <a:r>
-              <a:rPr sz="1500">
-                <a:solidFill>
-                  <a:srgbClr val="22282E"/>
-                </a:solidFill>
-              </a:rPr>
-              <a:t>•  listas explícitamente lo que descartaste; el resumen ejecutivo no tiene jerga.</a:t>
+              <a:t>•  Los datos de una sesión de laboratorio (de las clases 333–336) y un LLM. Ten a mano la evidencia</a:t>
+            </a:r>
+          </a:p>
+          <a:p>
+            <a:pPr>
+              <a:spcAft>
+                <a:spcPts val="600"/>
+              </a:spcAft>
+            </a:pPr>
+            <a:r>
+              <a:rPr sz="1500">
+                <a:solidFill>
+                  <a:srgbClr val="22282E"/>
+                </a:solidFill>
+              </a:rPr>
+              <a:t>•  cruda para verificar lo que el informe afirme.</a:t>
             </a:r>
           </a:p>
         </p:txBody>
